--- a/ppt/BO_DB운영_발표.pptx
+++ b/ppt/BO_DB운영_발표.pptx
@@ -69,6 +69,8 @@
     <p:sldId id="318" r:id="rId68"/>
     <p:sldId id="319" r:id="rId69"/>
     <p:sldId id="320" r:id="rId70"/>
+    <p:sldId id="321" r:id="rId71"/>
+    <p:sldId id="322" r:id="rId72"/>
     <p:sldId id="262" r:id="rId7"/>
   </p:sldIdLst>
   <p:sldSz cx="10693400" cy="7561263"/>
@@ -13094,6 +13096,18 @@
             </a:r>
             <a:endParaRPr lang="ko-KR" altLang="en-US" sz="4800" dirty="0"/>
           </a:p>
+          <a:p>
+            <a:pPr>
+              <a:lnSpc>
+                <a:spcPct val="150000"/>
+              </a:lnSpc>
+            </a:pPr>
+            <a:r>
+              <a:rPr lang="en-US" altLang="ko-KR" dirty="0"/>
+              <a:t>05</a:t>
+            </a:r>
+            <a:endParaRPr lang="ko-KR" altLang="en-US" sz="4800" dirty="0"/>
+          </a:p>
         </p:txBody>
       </p:sp>
       <p:sp>
@@ -13384,7 +13398,7 @@
                   <a:srgbClr val="9DA6AB"/>
                 </a:solidFill>
               </a:rPr>
-              <a:t>1) 10만 건 주문 생성  2) 병목 분석 및 성능 개선</a:t>
+              <a:t>1) 10만 건 주문 생성  2) 정합성·커밋 설계</a:t>
             </a:r>
             <a:r>
               <a:rPr lang="ko-KR" altLang="en-US" sz="1400" dirty="0">
@@ -13428,6 +13442,80 @@
       </p:sp>
       <p:sp>
         <p:nvSpPr>
+          <p:cNvPr id="921" name="텍스트 개체 틀 20"/>
+          <p:cNvSpPr>
+            <a:spLocks noGrp="1"/>
+          </p:cNvSpPr>
+          <p:nvPr>
+            <p:ph type="body" sz="quarter" idx="19"/>
+          </p:nvPr>
+        </p:nvSpPr>
+        <p:spPr>
+          <a:xfrm>
+            <a:off x="5994773" y="6486855"/>
+            <a:ext cx="4392487" cy="557164"/>
+          </a:xfrm>
+        </p:spPr>
+        <p:txBody>
+          <a:bodyPr>
+            <a:normAutofit/>
+          </a:bodyPr>
+          <a:lstStyle/>
+          <a:p>
+            <a:pPr>
+              <a:buNone/>
+              <a:defRPr/>
+            </a:pPr>
+            <a:r>
+              <a:rPr lang="en-US" altLang="ko-KR" sz="1400" dirty="0">
+                <a:solidFill>
+                  <a:srgbClr val="9DA6AB"/>
+                </a:solidFill>
+              </a:rPr>
+              <a:t>1) 병목 3종 진단  2) BULK COLLECT 개선·실측</a:t>
+            </a:r>
+            <a:r>
+              <a:rPr lang="ko-KR" altLang="en-US" sz="1400" dirty="0">
+                <a:solidFill>
+                  <a:srgbClr val="9DA6AB"/>
+                </a:solidFill>
+              </a:rPr>
+              <a:t/>
+            </a:r>
+            <a:r>
+              <a:rPr lang="en-US" altLang="ko-KR" sz="1400" dirty="0">
+                <a:solidFill>
+                  <a:srgbClr val="9DA6AB"/>
+                </a:solidFill>
+              </a:rPr>
+              <a:t/>
+            </a:r>
+            <a:r>
+              <a:rPr lang="ko-KR" altLang="en-US" sz="1400" dirty="0">
+                <a:solidFill>
+                  <a:srgbClr val="9DA6AB"/>
+                </a:solidFill>
+              </a:rPr>
+              <a:t/>
+            </a:r>
+            <a:r>
+              <a:rPr lang="ko-KR" altLang="en-US" sz="1400" dirty="0" smtClean="0">
+                <a:solidFill>
+                  <a:srgbClr val="9DA6AB"/>
+                </a:solidFill>
+              </a:rPr>
+              <a:t/>
+            </a:r>
+            <a:endParaRPr lang="ko-KR" altLang="en-US" sz="1400" dirty="0">
+              <a:solidFill>
+                <a:srgbClr val="9DA6AB"/>
+              </a:solidFill>
+            </a:endParaRPr>
+          </a:p>
+        </p:txBody>
+      </p:sp>
+      <p:sp>
+        <p:nvSpPr>
           <p:cNvPr id="22" name="텍스트 개체 틀 21"/>
           <p:cNvSpPr>
             <a:spLocks noGrp="1"/>
@@ -13447,7 +13535,43 @@
                   <a:srgbClr val="50646E"/>
                 </a:solidFill>
               </a:rPr>
-              <a:t>PL/SQL 대량 데이터 배치 처리</a:t>
+              <a:t>PL/SQL 대량 데이터 배치 처리 (구현)</a:t>
+            </a:r>
+            <a:endParaRPr lang="ko-KR" altLang="en-US" sz="1800" dirty="0">
+              <a:solidFill>
+                <a:srgbClr val="50646E"/>
+              </a:solidFill>
+            </a:endParaRPr>
+          </a:p>
+        </p:txBody>
+      </p:sp>
+      <p:sp>
+        <p:nvSpPr>
+          <p:cNvPr id="922" name="텍스트 개체 틀 21"/>
+          <p:cNvSpPr>
+            <a:spLocks noGrp="1"/>
+          </p:cNvSpPr>
+          <p:nvPr>
+            <p:ph type="body" sz="quarter" idx="20"/>
+          </p:nvPr>
+        </p:nvSpPr>
+        <p:spPr>
+          <a:xfrm>
+            <a:off x="5994773" y="6088881"/>
+            <a:ext cx="4392487" cy="397974"/>
+          </a:xfrm>
+        </p:spPr>
+        <p:txBody>
+          <a:bodyPr/>
+          <a:lstStyle/>
+          <a:p>
+            <a:r>
+              <a:rPr lang="ko-KR" altLang="en-US" dirty="0">
+                <a:solidFill>
+                  <a:srgbClr val="50646E"/>
+                </a:solidFill>
+              </a:rPr>
+              <a:t>배치 성능 측정 및 병목 분석/개선</a:t>
             </a:r>
             <a:endParaRPr lang="ko-KR" altLang="en-US" sz="1800" dirty="0">
               <a:solidFill>
@@ -21552,7 +21676,7 @@
           <a:p>
             <a:r>
               <a:rPr lang="ko-KR" altLang="en-US" dirty="0"/>
-              <a:t>복구 전략 수립 (Backup &amp; Recovery)</a:t>
+              <a:t>백업 및 복구 전략 (Backup &amp; Recovery)</a:t>
             </a:r>
             <a:r>
               <a:rPr lang="en-US" altLang="ko-KR" dirty="0"/>
@@ -23884,7 +24008,7 @@
           <a:p>
             <a:r>
               <a:rPr lang="ko-KR" altLang="en-US" dirty="0"/>
-              <a:t>PL/SQL 대량 데이터 배치 처리</a:t>
+              <a:t>PL/SQL 대량 데이터 배치 처리 (구현)</a:t>
             </a:r>
             <a:r>
               <a:rPr lang="en-US" altLang="ko-KR" dirty="0"/>
@@ -23925,7 +24049,7 @@
                 <a:latin typeface="다키 L" pitchFamily="2" charset="-127"/>
                 <a:ea typeface="다키 L" pitchFamily="2" charset="-127"/>
               </a:rPr>
-              <a:t>1) 10만 건 주문 생성   2) 정합성·커밋 설계   3) 병목 분석 및 성능 개선</a:t>
+              <a:t>1) 10만 건 주문 생성   2) 정합성 설계   3) 커밋 설계 근거</a:t>
             </a:r>
             <a:r>
               <a:rPr lang="ko-KR" altLang="en-US" dirty="0">
@@ -24089,7 +24213,7 @@
                   <a:srgbClr val="50646E"/>
                 </a:solidFill>
               </a:rPr>
-              <a:t>naive vs optimized 두 버전으로 병목 재현·제거</a:t>
+              <a:t>naive vs optimized 두 버전으로 배치 프로그램 설계</a:t>
             </a:r>
             <a:r>
               <a:rPr lang="ko-KR" altLang="en-US" sz="1600" dirty="0">
@@ -24168,6 +24292,21 @@
                 </a:solidFill>
               </a:rPr>
               <a:t>• naive는 병목 재현용, optimized는 제거 가능한 비효율만 제거</a:t>
+            </a:r>
+          </a:p>
+          <a:p>
+            <a:pPr>
+              <a:spcAft>
+                <a:spcPts val="600"/>
+              </a:spcAft>
+            </a:pPr>
+            <a:r>
+              <a:rPr sz="1500">
+                <a:solidFill>
+                  <a:srgbClr val="222730"/>
+                </a:solidFill>
+              </a:rPr>
+              <a:t>• 구현(Part4) → 성능 측정·개선(Part5) 2단계로 진행</a:t>
             </a:r>
           </a:p>
         </p:txBody>
@@ -24237,7 +24376,7 @@
           <a:p>
             <a:r>
               <a:rPr lang="ko-KR" altLang="en-US" dirty="0" smtClean="0"/>
-              <a:t>naive vs optimized</a:t>
+              <a:t>naive vs optimized 프로그램</a:t>
             </a:r>
             <a:r>
               <a:rPr lang="en-US" altLang="ko-KR" dirty="0" smtClean="0"/>
@@ -25006,6 +25145,1080 @@
 </file>
 
 <file path=ppt/slides/slide57.xml><?xml version="1.0" encoding="utf-8"?>
+<p:sld xmlns:a="http://schemas.openxmlformats.org/drawingml/2006/main" xmlns:p="http://schemas.openxmlformats.org/presentationml/2006/main" xmlns:r="http://schemas.openxmlformats.org/officeDocument/2006/relationships">
+  <p:cSld>
+    <p:spTree>
+      <p:nvGrpSpPr>
+        <p:cNvPr id="1" name=""/>
+        <p:cNvGrpSpPr/>
+        <p:nvPr/>
+      </p:nvGrpSpPr>
+      <p:grpSpPr/>
+      <p:sp>
+        <p:nvSpPr>
+          <p:cNvPr id="4" name="텍스트 개체 틀 3"/>
+          <p:cNvSpPr>
+            <a:spLocks noGrp="1"/>
+          </p:cNvSpPr>
+          <p:nvPr>
+            <p:ph type="body" sz="quarter" idx="10"/>
+          </p:nvPr>
+        </p:nvSpPr>
+        <p:spPr/>
+        <p:txBody>
+          <a:bodyPr>
+            <a:normAutofit/>
+          </a:bodyPr>
+          <a:lstStyle/>
+          <a:p>
+            <a:pPr algn="r"/>
+            <a:r>
+              <a:rPr lang="en-US" altLang="ko-KR" sz="1600" dirty="0" smtClean="0"/>
+              <a:t>Cleanup</a:t>
+            </a:r>
+            <a:r>
+              <a:rPr lang="ko-KR" altLang="en-US" sz="1600" dirty="0" smtClean="0"/>
+              <a:t/>
+            </a:r>
+            <a:endParaRPr lang="ko-KR" altLang="en-US" sz="1600" dirty="0"/>
+          </a:p>
+        </p:txBody>
+      </p:sp>
+      <p:sp>
+        <p:nvSpPr>
+          <p:cNvPr id="5" name="텍스트 개체 틀 4"/>
+          <p:cNvSpPr>
+            <a:spLocks noGrp="1"/>
+          </p:cNvSpPr>
+          <p:nvPr>
+            <p:ph type="body" sz="quarter" idx="11"/>
+          </p:nvPr>
+        </p:nvSpPr>
+        <p:spPr/>
+        <p:txBody>
+          <a:bodyPr/>
+          <a:lstStyle/>
+          <a:p>
+            <a:r>
+              <a:rPr lang="ko-KR" altLang="en-US" dirty="0" smtClean="0"/>
+              <a:t>반복 테스트 데이터 삭제</a:t>
+            </a:r>
+            <a:r>
+              <a:rPr lang="en-US" altLang="ko-KR" dirty="0" smtClean="0"/>
+              <a:t/>
+            </a:r>
+            <a:endParaRPr lang="ko-KR" altLang="en-US" dirty="0"/>
+          </a:p>
+        </p:txBody>
+      </p:sp>
+      <p:sp>
+        <p:nvSpPr>
+          <p:cNvPr id="10" name="텍스트 개체 틀 4"/>
+          <p:cNvSpPr>
+            <a:spLocks noGrp="1"/>
+          </p:cNvSpPr>
+          <p:nvPr>
+            <p:ph type="body" sz="quarter" idx="12"/>
+          </p:nvPr>
+        </p:nvSpPr>
+        <p:spPr>
+          <a:xfrm>
+            <a:off x="234132" y="828303"/>
+            <a:ext cx="7956884" cy="835266"/>
+          </a:xfrm>
+        </p:spPr>
+        <p:txBody>
+          <a:bodyPr vert="horz" lIns="91440" tIns="45720" rIns="91440" bIns="45720" rtlCol="0">
+            <a:normAutofit/>
+          </a:bodyPr>
+          <a:lstStyle/>
+          <a:p>
+            <a:pPr defTabSz="914400">
+              <a:spcBef>
+                <a:spcPct val="20000"/>
+              </a:spcBef>
+            </a:pPr>
+            <a:r>
+              <a:rPr lang="en-US" altLang="ko-KR" sz="1600" dirty="0">
+                <a:solidFill>
+                  <a:srgbClr val="50646E"/>
+                </a:solidFill>
+              </a:rPr>
+              <a:t>BATCH_RUN_LOG 구간으로 안전 삭제</a:t>
+            </a:r>
+            <a:r>
+              <a:rPr lang="ko-KR" altLang="en-US" sz="1600" dirty="0">
+                <a:solidFill>
+                  <a:srgbClr val="50646E"/>
+                </a:solidFill>
+              </a:rPr>
+              <a:t/>
+            </a:r>
+            <a:r>
+              <a:rPr lang="en-US" altLang="ko-KR" sz="1600" dirty="0">
+                <a:solidFill>
+                  <a:srgbClr val="50646E"/>
+                </a:solidFill>
+              </a:rPr>
+              <a:t/>
+            </a:r>
+          </a:p>
+        </p:txBody>
+      </p:sp>
+      <p:sp>
+        <p:nvSpPr>
+          <p:cNvPr id="11" name="내용 개체 틀 10"/>
+          <p:cNvSpPr>
+            <a:spLocks noGrp="1"/>
+          </p:cNvSpPr>
+          <p:nvPr>
+            <p:ph idx="13"/>
+          </p:nvPr>
+        </p:nvSpPr>
+        <p:spPr/>
+        <p:txBody>
+          <a:bodyPr wrap="square"/>
+          <a:lstStyle/>
+          <a:p>
+            <a:pPr>
+              <a:spcAft>
+                <a:spcPts val="600"/>
+              </a:spcAft>
+            </a:pPr>
+            <a:r>
+              <a:rPr sz="1500">
+                <a:solidFill>
+                  <a:srgbClr val="222730"/>
+                </a:solidFill>
+              </a:rPr>
+              <a:t>• 실행마다 시작~종료 ORDER_ID 구간을 BATCH_RUN_LOG에 기록</a:t>
+            </a:r>
+            <a:endParaRPr lang="ko-KR" altLang="en-US" dirty="0"/>
+          </a:p>
+          <a:p>
+            <a:pPr>
+              <a:spcAft>
+                <a:spcPts val="600"/>
+              </a:spcAft>
+            </a:pPr>
+            <a:r>
+              <a:rPr sz="1500">
+                <a:solidFill>
+                  <a:srgbClr val="222730"/>
+                </a:solidFill>
+              </a:rPr>
+              <a:t>• 자식→부모 순서(SHIPMENTS→ORDER_ITEMS→ORDERS)로 삭제 → FK 위반 방지</a:t>
+            </a:r>
+          </a:p>
+          <a:p>
+            <a:pPr>
+              <a:spcAft>
+                <a:spcPts val="600"/>
+              </a:spcAft>
+            </a:pPr>
+            <a:r>
+              <a:rPr sz="1500">
+                <a:solidFill>
+                  <a:srgbClr val="222730"/>
+                </a:solidFill>
+              </a:rPr>
+              <a:t>• CLEANUP_BATCH_RUN(run_id) 프로시저로 특정 실행분만 정리</a:t>
+            </a:r>
+          </a:p>
+        </p:txBody>
+      </p:sp>
+    </p:spTree>
+  </p:cSld>
+  <p:clrMapOvr>
+    <a:masterClrMapping/>
+  </p:clrMapOvr>
+</p:sld>
+</file>
+
+<file path=ppt/slides/slide58.xml><?xml version="1.0" encoding="utf-8"?>
+<p:sld xmlns:a="http://schemas.openxmlformats.org/drawingml/2006/main" xmlns:p="http://schemas.openxmlformats.org/presentationml/2006/main" xmlns:r="http://schemas.openxmlformats.org/officeDocument/2006/relationships">
+  <p:cSld>
+    <p:spTree>
+      <p:nvGrpSpPr>
+        <p:cNvPr id="1" name=""/>
+        <p:cNvGrpSpPr/>
+        <p:nvPr/>
+      </p:nvGrpSpPr>
+      <p:grpSpPr/>
+      <p:sp>
+        <p:nvSpPr>
+          <p:cNvPr id="4" name="제목 3"/>
+          <p:cNvSpPr>
+            <a:spLocks noGrp="1"/>
+          </p:cNvSpPr>
+          <p:nvPr>
+            <p:ph type="title"/>
+          </p:nvPr>
+        </p:nvSpPr>
+        <p:spPr/>
+        <p:txBody>
+          <a:bodyPr/>
+          <a:lstStyle/>
+          <a:p>
+            <a:r>
+              <a:rPr lang="ko-KR" altLang="en-US" dirty="0"/>
+              <a:t>배치 성능 측정 및 병목 분석/개선</a:t>
+            </a:r>
+            <a:r>
+              <a:rPr lang="en-US" altLang="ko-KR" dirty="0"/>
+              <a:t/>
+            </a:r>
+            <a:br>
+              <a:rPr lang="en-US" altLang="ko-KR" dirty="0"/>
+            </a:br>
+            <a:r>
+              <a:rPr lang="ko-KR" altLang="en-US" dirty="0"/>
+              <a:t/>
+            </a:r>
+          </a:p>
+        </p:txBody>
+      </p:sp>
+      <p:sp>
+        <p:nvSpPr>
+          <p:cNvPr id="5" name="텍스트 개체 틀 4"/>
+          <p:cNvSpPr>
+            <a:spLocks noGrp="1"/>
+          </p:cNvSpPr>
+          <p:nvPr>
+            <p:ph type="body" sz="quarter" idx="10"/>
+          </p:nvPr>
+        </p:nvSpPr>
+        <p:spPr/>
+        <p:txBody>
+          <a:bodyPr anchor="ctr"/>
+          <a:lstStyle/>
+          <a:p>
+            <a:pPr>
+              <a:lnSpc>
+                <a:spcPct val="150000"/>
+              </a:lnSpc>
+            </a:pPr>
+            <a:r>
+              <a:rPr lang="en-US" altLang="ko-KR" dirty="0">
+                <a:latin typeface="다키 L" pitchFamily="2" charset="-127"/>
+                <a:ea typeface="다키 L" pitchFamily="2" charset="-127"/>
+              </a:rPr>
+              <a:t>1) 병목 3종 진단   2) 컨텍스트 스위칭·BULK COLLECT   3) 성능 실측</a:t>
+            </a:r>
+            <a:r>
+              <a:rPr lang="ko-KR" altLang="en-US" dirty="0">
+                <a:latin typeface="다키 L" pitchFamily="2" charset="-127"/>
+                <a:ea typeface="다키 L" pitchFamily="2" charset="-127"/>
+              </a:rPr>
+              <a:t/>
+            </a:r>
+            <a:r>
+              <a:rPr lang="en-US" altLang="ko-KR" dirty="0">
+                <a:latin typeface="다키 L" pitchFamily="2" charset="-127"/>
+                <a:ea typeface="다키 L" pitchFamily="2" charset="-127"/>
+              </a:rPr>
+              <a:t/>
+            </a:r>
+          </a:p>
+        </p:txBody>
+      </p:sp>
+      <p:sp>
+        <p:nvSpPr>
+          <p:cNvPr id="6" name="텍스트 개체 틀 5"/>
+          <p:cNvSpPr>
+            <a:spLocks noGrp="1"/>
+          </p:cNvSpPr>
+          <p:nvPr>
+            <p:ph type="body" sz="quarter" idx="11"/>
+          </p:nvPr>
+        </p:nvSpPr>
+        <p:spPr/>
+        <p:txBody>
+          <a:bodyPr>
+            <a:noAutofit/>
+          </a:bodyPr>
+          <a:lstStyle/>
+          <a:p>
+            <a:r>
+              <a:rPr lang="en-US" altLang="ko-KR" sz="6000" dirty="0" smtClean="0">
+                <a:solidFill>
+                  <a:srgbClr val="2484C6"/>
+                </a:solidFill>
+                <a:latin typeface="다키 M Title" pitchFamily="2" charset="-127"/>
+                <a:ea typeface="다키 M Title" pitchFamily="2" charset="-127"/>
+              </a:rPr>
+              <a:t>05</a:t>
+            </a:r>
+            <a:endParaRPr lang="ko-KR" altLang="en-US" sz="6000" dirty="0">
+              <a:solidFill>
+                <a:srgbClr val="2484C6"/>
+              </a:solidFill>
+              <a:latin typeface="다키 M Title" pitchFamily="2" charset="-127"/>
+              <a:ea typeface="다키 M Title" pitchFamily="2" charset="-127"/>
+            </a:endParaRPr>
+          </a:p>
+        </p:txBody>
+      </p:sp>
+    </p:spTree>
+  </p:cSld>
+  <p:clrMapOvr>
+    <a:masterClrMapping/>
+  </p:clrMapOvr>
+</p:sld>
+</file>
+
+<file path=ppt/slides/slide59.xml><?xml version="1.0" encoding="utf-8"?>
+<p:sld xmlns:a="http://schemas.openxmlformats.org/drawingml/2006/main" xmlns:p="http://schemas.openxmlformats.org/presentationml/2006/main" xmlns:r="http://schemas.openxmlformats.org/officeDocument/2006/relationships">
+  <p:cSld>
+    <p:spTree>
+      <p:nvGrpSpPr>
+        <p:cNvPr id="1" name=""/>
+        <p:cNvGrpSpPr/>
+        <p:nvPr/>
+      </p:nvGrpSpPr>
+      <p:grpSpPr/>
+      <p:sp>
+        <p:nvSpPr>
+          <p:cNvPr id="4" name="텍스트 개체 틀 3"/>
+          <p:cNvSpPr>
+            <a:spLocks noGrp="1"/>
+          </p:cNvSpPr>
+          <p:nvPr>
+            <p:ph type="body" sz="quarter" idx="10"/>
+          </p:nvPr>
+        </p:nvSpPr>
+        <p:spPr/>
+        <p:txBody>
+          <a:bodyPr>
+            <a:normAutofit/>
+          </a:bodyPr>
+          <a:lstStyle/>
+          <a:p>
+            <a:pPr algn="r"/>
+            <a:r>
+              <a:rPr lang="en-US" altLang="ko-KR" sz="1600" dirty="0" smtClean="0"/>
+              <a:t>Overview</a:t>
+            </a:r>
+            <a:r>
+              <a:rPr lang="ko-KR" altLang="en-US" sz="1600" dirty="0" smtClean="0"/>
+              <a:t/>
+            </a:r>
+            <a:endParaRPr lang="ko-KR" altLang="en-US" sz="1600" dirty="0"/>
+          </a:p>
+        </p:txBody>
+      </p:sp>
+      <p:sp>
+        <p:nvSpPr>
+          <p:cNvPr id="5" name="텍스트 개체 틀 4"/>
+          <p:cNvSpPr>
+            <a:spLocks noGrp="1"/>
+          </p:cNvSpPr>
+          <p:nvPr>
+            <p:ph type="body" sz="quarter" idx="11"/>
+          </p:nvPr>
+        </p:nvSpPr>
+        <p:spPr/>
+        <p:txBody>
+          <a:bodyPr/>
+          <a:lstStyle/>
+          <a:p>
+            <a:r>
+              <a:rPr lang="ko-KR" altLang="en-US" dirty="0" smtClean="0"/>
+              <a:t>개요 — 무엇을 측정했나</a:t>
+            </a:r>
+            <a:r>
+              <a:rPr lang="en-US" altLang="ko-KR" dirty="0" smtClean="0"/>
+              <a:t/>
+            </a:r>
+            <a:endParaRPr lang="ko-KR" altLang="en-US" dirty="0"/>
+          </a:p>
+        </p:txBody>
+      </p:sp>
+      <p:sp>
+        <p:nvSpPr>
+          <p:cNvPr id="10" name="텍스트 개체 틀 4"/>
+          <p:cNvSpPr>
+            <a:spLocks noGrp="1"/>
+          </p:cNvSpPr>
+          <p:nvPr>
+            <p:ph type="body" sz="quarter" idx="12"/>
+          </p:nvPr>
+        </p:nvSpPr>
+        <p:spPr>
+          <a:xfrm>
+            <a:off x="234132" y="828303"/>
+            <a:ext cx="7956884" cy="835266"/>
+          </a:xfrm>
+        </p:spPr>
+        <p:txBody>
+          <a:bodyPr vert="horz" lIns="91440" tIns="45720" rIns="91440" bIns="45720" rtlCol="0">
+            <a:normAutofit/>
+          </a:bodyPr>
+          <a:lstStyle/>
+          <a:p>
+            <a:pPr defTabSz="914400">
+              <a:spcBef>
+                <a:spcPct val="20000"/>
+              </a:spcBef>
+            </a:pPr>
+            <a:r>
+              <a:rPr lang="en-US" altLang="ko-KR" sz="1600" dirty="0">
+                <a:solidFill>
+                  <a:srgbClr val="50646E"/>
+                </a:solidFill>
+              </a:rPr>
+              <a:t>제거 가능한 병목만 제거하고 구조적 비용은 유지</a:t>
+            </a:r>
+            <a:r>
+              <a:rPr lang="ko-KR" altLang="en-US" sz="1600" dirty="0">
+                <a:solidFill>
+                  <a:srgbClr val="50646E"/>
+                </a:solidFill>
+              </a:rPr>
+              <a:t/>
+            </a:r>
+            <a:r>
+              <a:rPr lang="en-US" altLang="ko-KR" sz="1600" dirty="0">
+                <a:solidFill>
+                  <a:srgbClr val="50646E"/>
+                </a:solidFill>
+              </a:rPr>
+              <a:t/>
+            </a:r>
+          </a:p>
+        </p:txBody>
+      </p:sp>
+      <p:sp>
+        <p:nvSpPr>
+          <p:cNvPr id="11" name="내용 개체 틀 10"/>
+          <p:cNvSpPr>
+            <a:spLocks noGrp="1"/>
+          </p:cNvSpPr>
+          <p:nvPr>
+            <p:ph idx="13"/>
+          </p:nvPr>
+        </p:nvSpPr>
+        <p:spPr/>
+        <p:txBody>
+          <a:bodyPr wrap="square"/>
+          <a:lstStyle/>
+          <a:p>
+            <a:pPr>
+              <a:spcAft>
+                <a:spcPts val="600"/>
+              </a:spcAft>
+            </a:pPr>
+            <a:r>
+              <a:rPr sz="1500">
+                <a:solidFill>
+                  <a:srgbClr val="222730"/>
+                </a:solidFill>
+              </a:rPr>
+              <a:t>• naive/optimized를 동일 건수로 실행해 처리시간·건당 비용 비교</a:t>
+            </a:r>
+            <a:endParaRPr lang="ko-KR" altLang="en-US" dirty="0"/>
+          </a:p>
+          <a:p>
+            <a:pPr>
+              <a:spcAft>
+                <a:spcPts val="600"/>
+              </a:spcAft>
+            </a:pPr>
+            <a:r>
+              <a:rPr sz="1500">
+                <a:solidFill>
+                  <a:srgbClr val="222730"/>
+                </a:solidFill>
+              </a:rPr>
+              <a:t>• BATCH_RUN_LOG로 실행별 소요시간·구간을 기록·재현</a:t>
+            </a:r>
+          </a:p>
+          <a:p>
+            <a:pPr>
+              <a:spcAft>
+                <a:spcPts val="600"/>
+              </a:spcAft>
+            </a:pPr>
+            <a:r>
+              <a:rPr sz="1500">
+                <a:solidFill>
+                  <a:srgbClr val="222730"/>
+                </a:solidFill>
+              </a:rPr>
+              <a:t>• 병목을 "제거 가능"과 "구조적(요구사항)"으로 분리해 판단</a:t>
+            </a:r>
+          </a:p>
+        </p:txBody>
+      </p:sp>
+    </p:spTree>
+  </p:cSld>
+  <p:clrMapOvr>
+    <a:masterClrMapping/>
+  </p:clrMapOvr>
+</p:sld>
+</file>
+
+<file path=ppt/slides/slide6.xml><?xml version="1.0" encoding="utf-8"?>
+<p:sld xmlns:a="http://schemas.openxmlformats.org/drawingml/2006/main" xmlns:p="http://schemas.openxmlformats.org/presentationml/2006/main" xmlns:r="http://schemas.openxmlformats.org/officeDocument/2006/relationships">
+  <p:cSld>
+    <p:spTree>
+      <p:nvGrpSpPr>
+        <p:cNvPr id="1" name=""/>
+        <p:cNvGrpSpPr/>
+        <p:nvPr/>
+      </p:nvGrpSpPr>
+      <p:grpSpPr/>
+      <p:sp>
+        <p:nvSpPr>
+          <p:cNvPr id="4" name="제목 3"/>
+          <p:cNvSpPr>
+            <a:spLocks noGrp="1"/>
+          </p:cNvSpPr>
+          <p:nvPr>
+            <p:ph type="title"/>
+          </p:nvPr>
+        </p:nvSpPr>
+        <p:spPr/>
+        <p:txBody>
+          <a:bodyPr/>
+          <a:lstStyle/>
+          <a:p>
+            <a:r>
+              <a:rPr lang="ko-KR" altLang="en-US" dirty="0"/>
+              <a:t>스키마 분석 및 트랜잭션 시뮬레이션</a:t>
+            </a:r>
+            <a:r>
+              <a:rPr lang="en-US" altLang="ko-KR" dirty="0"/>
+              <a:t/>
+            </a:r>
+            <a:br>
+              <a:rPr lang="en-US" altLang="ko-KR" dirty="0"/>
+            </a:br>
+            <a:r>
+              <a:rPr lang="ko-KR" altLang="en-US" dirty="0"/>
+              <a:t/>
+            </a:r>
+          </a:p>
+        </p:txBody>
+      </p:sp>
+      <p:sp>
+        <p:nvSpPr>
+          <p:cNvPr id="5" name="텍스트 개체 틀 4"/>
+          <p:cNvSpPr>
+            <a:spLocks noGrp="1"/>
+          </p:cNvSpPr>
+          <p:nvPr>
+            <p:ph type="body" sz="quarter" idx="10"/>
+          </p:nvPr>
+        </p:nvSpPr>
+        <p:spPr/>
+        <p:txBody>
+          <a:bodyPr anchor="ctr"/>
+          <a:lstStyle/>
+          <a:p>
+            <a:pPr>
+              <a:lnSpc>
+                <a:spcPct val="150000"/>
+              </a:lnSpc>
+            </a:pPr>
+            <a:r>
+              <a:rPr lang="en-US" altLang="ko-KR" dirty="0">
+                <a:latin typeface="다키 L" pitchFamily="2" charset="-127"/>
+                <a:ea typeface="다키 L" pitchFamily="2" charset="-127"/>
+              </a:rPr>
+              <a:t>1) BO 스키마·ERD 역공학   2) 트랜잭션 T1~T7 ACID 검증   3) 데이터 이상치 탐지</a:t>
+            </a:r>
+            <a:r>
+              <a:rPr lang="ko-KR" altLang="en-US" dirty="0">
+                <a:latin typeface="다키 L" pitchFamily="2" charset="-127"/>
+                <a:ea typeface="다키 L" pitchFamily="2" charset="-127"/>
+              </a:rPr>
+              <a:t/>
+            </a:r>
+            <a:r>
+              <a:rPr lang="en-US" altLang="ko-KR" dirty="0">
+                <a:latin typeface="다키 L" pitchFamily="2" charset="-127"/>
+                <a:ea typeface="다키 L" pitchFamily="2" charset="-127"/>
+              </a:rPr>
+              <a:t/>
+            </a:r>
+          </a:p>
+        </p:txBody>
+      </p:sp>
+      <p:sp>
+        <p:nvSpPr>
+          <p:cNvPr id="6" name="텍스트 개체 틀 5"/>
+          <p:cNvSpPr>
+            <a:spLocks noGrp="1"/>
+          </p:cNvSpPr>
+          <p:nvPr>
+            <p:ph type="body" sz="quarter" idx="11"/>
+          </p:nvPr>
+        </p:nvSpPr>
+        <p:spPr/>
+        <p:txBody>
+          <a:bodyPr>
+            <a:noAutofit/>
+          </a:bodyPr>
+          <a:lstStyle/>
+          <a:p>
+            <a:r>
+              <a:rPr lang="en-US" altLang="ko-KR" sz="6000" dirty="0" smtClean="0">
+                <a:solidFill>
+                  <a:srgbClr val="2484C6"/>
+                </a:solidFill>
+                <a:latin typeface="다키 M Title" pitchFamily="2" charset="-127"/>
+                <a:ea typeface="다키 M Title" pitchFamily="2" charset="-127"/>
+              </a:rPr>
+              <a:t>01</a:t>
+            </a:r>
+            <a:endParaRPr lang="ko-KR" altLang="en-US" sz="6000" dirty="0">
+              <a:solidFill>
+                <a:srgbClr val="2484C6"/>
+              </a:solidFill>
+              <a:latin typeface="다키 M Title" pitchFamily="2" charset="-127"/>
+              <a:ea typeface="다키 M Title" pitchFamily="2" charset="-127"/>
+            </a:endParaRPr>
+          </a:p>
+        </p:txBody>
+      </p:sp>
+    </p:spTree>
+  </p:cSld>
+  <p:clrMapOvr>
+    <a:masterClrMapping/>
+  </p:clrMapOvr>
+</p:sld>
+</file>
+
+<file path=ppt/slides/slide60.xml><?xml version="1.0" encoding="utf-8"?>
+<p:sld xmlns:a="http://schemas.openxmlformats.org/drawingml/2006/main" xmlns:p="http://schemas.openxmlformats.org/presentationml/2006/main" xmlns:r="http://schemas.openxmlformats.org/officeDocument/2006/relationships">
+  <p:cSld>
+    <p:spTree>
+      <p:nvGrpSpPr>
+        <p:cNvPr id="1" name=""/>
+        <p:cNvGrpSpPr/>
+        <p:nvPr/>
+      </p:nvGrpSpPr>
+      <p:grpSpPr/>
+      <p:sp>
+        <p:nvSpPr>
+          <p:cNvPr id="4" name="텍스트 개체 틀 3"/>
+          <p:cNvSpPr>
+            <a:spLocks noGrp="1"/>
+          </p:cNvSpPr>
+          <p:nvPr>
+            <p:ph type="body" sz="quarter" idx="10"/>
+          </p:nvPr>
+        </p:nvSpPr>
+        <p:spPr/>
+        <p:txBody>
+          <a:bodyPr>
+            <a:normAutofit/>
+          </a:bodyPr>
+          <a:lstStyle/>
+          <a:p>
+            <a:pPr algn="r"/>
+            <a:r>
+              <a:rPr lang="en-US" altLang="ko-KR" sz="1600" dirty="0" smtClean="0"/>
+              <a:t>Bottleneck</a:t>
+            </a:r>
+            <a:r>
+              <a:rPr lang="ko-KR" altLang="en-US" sz="1600" dirty="0" smtClean="0"/>
+              <a:t/>
+            </a:r>
+            <a:endParaRPr lang="ko-KR" altLang="en-US" sz="1600" dirty="0"/>
+          </a:p>
+        </p:txBody>
+      </p:sp>
+      <p:sp>
+        <p:nvSpPr>
+          <p:cNvPr id="5" name="텍스트 개체 틀 4"/>
+          <p:cNvSpPr>
+            <a:spLocks noGrp="1"/>
+          </p:cNvSpPr>
+          <p:nvPr>
+            <p:ph type="body" sz="quarter" idx="11"/>
+          </p:nvPr>
+        </p:nvSpPr>
+        <p:spPr/>
+        <p:txBody>
+          <a:bodyPr/>
+          <a:lstStyle/>
+          <a:p>
+            <a:r>
+              <a:rPr lang="ko-KR" altLang="en-US" dirty="0" smtClean="0"/>
+              <a:t>병목 분석</a:t>
+            </a:r>
+            <a:r>
+              <a:rPr lang="en-US" altLang="ko-KR" dirty="0" smtClean="0"/>
+              <a:t/>
+            </a:r>
+            <a:endParaRPr lang="ko-KR" altLang="en-US" dirty="0"/>
+          </a:p>
+        </p:txBody>
+      </p:sp>
+      <p:sp>
+        <p:nvSpPr>
+          <p:cNvPr id="10" name="텍스트 개체 틀 4"/>
+          <p:cNvSpPr>
+            <a:spLocks noGrp="1"/>
+          </p:cNvSpPr>
+          <p:nvPr>
+            <p:ph type="body" sz="quarter" idx="12"/>
+          </p:nvPr>
+        </p:nvSpPr>
+        <p:spPr>
+          <a:xfrm>
+            <a:off x="234132" y="828303"/>
+            <a:ext cx="7956884" cy="835266"/>
+          </a:xfrm>
+        </p:spPr>
+        <p:txBody>
+          <a:bodyPr vert="horz" lIns="91440" tIns="45720" rIns="91440" bIns="45720" rtlCol="0">
+            <a:normAutofit/>
+          </a:bodyPr>
+          <a:lstStyle/>
+          <a:p>
+            <a:pPr defTabSz="914400">
+              <a:spcBef>
+                <a:spcPct val="20000"/>
+              </a:spcBef>
+            </a:pPr>
+            <a:r>
+              <a:rPr lang="en-US" altLang="ko-KR" sz="1600" dirty="0">
+                <a:solidFill>
+                  <a:srgbClr val="50646E"/>
+                </a:solidFill>
+              </a:rPr>
+              <a:t>제거 가능 2가지 vs 구조적 1가지</a:t>
+            </a:r>
+            <a:r>
+              <a:rPr lang="ko-KR" altLang="en-US" sz="1600" dirty="0">
+                <a:solidFill>
+                  <a:srgbClr val="50646E"/>
+                </a:solidFill>
+              </a:rPr>
+              <a:t/>
+            </a:r>
+            <a:r>
+              <a:rPr lang="en-US" altLang="ko-KR" sz="1600" dirty="0">
+                <a:solidFill>
+                  <a:srgbClr val="50646E"/>
+                </a:solidFill>
+              </a:rPr>
+              <a:t/>
+            </a:r>
+          </a:p>
+        </p:txBody>
+      </p:sp>
+      <p:graphicFrame>
+        <p:nvGraphicFramePr>
+          <p:cNvPr id="11" name="Table 10"/>
+          <p:cNvGraphicFramePr>
+            <a:graphicFrameLocks noGrp="1"/>
+          </p:cNvGraphicFramePr>
+          <p:nvPr/>
+        </p:nvGraphicFramePr>
+        <p:xfrm>
+          <a:off x="317624" y="1764296"/>
+          <a:ext cx="10058400" cy="1536192"/>
+        </p:xfrm>
+        <a:graphic>
+          <a:graphicData uri="http://schemas.openxmlformats.org/drawingml/2006/table">
+            <a:tbl>
+              <a:tblPr firstRow="1" bandRow="1">
+                <a:tableStyleId>{5C22544A-7EE6-4342-B048-85BDC9FD1C3A}</a:tableStyleId>
+              </a:tblPr>
+              <a:tblGrid>
+                <a:gridCol w="3352800"/>
+                <a:gridCol w="3352800"/>
+                <a:gridCol w="3352800"/>
+              </a:tblGrid>
+              <a:tr h="384048">
+                <a:tc>
+                  <a:txBody>
+                    <a:bodyPr/>
+                    <a:lstStyle/>
+                    <a:p>
+                      <a:pPr algn="ctr"/>
+                      <a:r>
+                        <a:rPr b="1" sz="1150">
+                          <a:solidFill>
+                            <a:srgbClr val="FFFFFF"/>
+                          </a:solidFill>
+                        </a:rPr>
+                        <a:t>#</a:t>
+                      </a:r>
+                    </a:p>
+                  </a:txBody>
+                  <a:tcPr anchor="ctr" marT="25400" marB="25400">
+                    <a:solidFill>
+                      <a:srgbClr val="1B2A4A"/>
+                    </a:solidFill>
+                  </a:tcPr>
+                </a:tc>
+                <a:tc>
+                  <a:txBody>
+                    <a:bodyPr/>
+                    <a:lstStyle/>
+                    <a:p>
+                      <a:pPr algn="ctr"/>
+                      <a:r>
+                        <a:rPr b="1" sz="1150">
+                          <a:solidFill>
+                            <a:srgbClr val="FFFFFF"/>
+                          </a:solidFill>
+                        </a:rPr>
+                        <a:t>병목</a:t>
+                      </a:r>
+                    </a:p>
+                  </a:txBody>
+                  <a:tcPr anchor="ctr" marT="25400" marB="25400">
+                    <a:solidFill>
+                      <a:srgbClr val="1B2A4A"/>
+                    </a:solidFill>
+                  </a:tcPr>
+                </a:tc>
+                <a:tc>
+                  <a:txBody>
+                    <a:bodyPr/>
+                    <a:lstStyle/>
+                    <a:p>
+                      <a:pPr algn="ctr"/>
+                      <a:r>
+                        <a:rPr b="1" sz="1150">
+                          <a:solidFill>
+                            <a:srgbClr val="FFFFFF"/>
+                          </a:solidFill>
+                        </a:rPr>
+                        <a:t>성격</a:t>
+                      </a:r>
+                    </a:p>
+                  </a:txBody>
+                  <a:tcPr anchor="ctr" marT="25400" marB="25400">
+                    <a:solidFill>
+                      <a:srgbClr val="1B2A4A"/>
+                    </a:solidFill>
+                  </a:tcPr>
+                </a:tc>
+              </a:tr>
+              <a:tr h="384048">
+                <a:tc>
+                  <a:txBody>
+                    <a:bodyPr/>
+                    <a:lstStyle/>
+                    <a:p>
+                      <a:pPr algn="l"/>
+                      <a:r>
+                        <a:rPr sz="1100">
+                          <a:solidFill>
+                            <a:srgbClr val="222730"/>
+                          </a:solidFill>
+                        </a:rPr>
+                        <a:t>1</a:t>
+                      </a:r>
+                    </a:p>
+                  </a:txBody>
+                  <a:tcPr anchor="ctr" marT="12700" marB="12700">
+                    <a:solidFill>
+                      <a:srgbClr val="FFFFFF"/>
+                    </a:solidFill>
+                  </a:tcPr>
+                </a:tc>
+                <a:tc>
+                  <a:txBody>
+                    <a:bodyPr/>
+                    <a:lstStyle/>
+                    <a:p>
+                      <a:pPr algn="ctr"/>
+                      <a:r>
+                        <a:rPr sz="1100">
+                          <a:solidFill>
+                            <a:srgbClr val="222730"/>
+                          </a:solidFill>
+                        </a:rPr>
+                        <a:t>MAX(ORDER_ID)+1 매 반복 재조회</a:t>
+                      </a:r>
+                    </a:p>
+                  </a:txBody>
+                  <a:tcPr anchor="ctr" marT="12700" marB="12700">
+                    <a:solidFill>
+                      <a:srgbClr val="FFFFFF"/>
+                    </a:solidFill>
+                  </a:tcPr>
+                </a:tc>
+                <a:tc>
+                  <a:txBody>
+                    <a:bodyPr/>
+                    <a:lstStyle/>
+                    <a:p>
+                      <a:pPr algn="ctr"/>
+                      <a:r>
+                        <a:rPr sz="1100">
+                          <a:solidFill>
+                            <a:srgbClr val="222730"/>
+                          </a:solidFill>
+                        </a:rPr>
+                        <a:t>제거 가능(설계 결함)</a:t>
+                      </a:r>
+                    </a:p>
+                  </a:txBody>
+                  <a:tcPr anchor="ctr" marT="12700" marB="12700">
+                    <a:solidFill>
+                      <a:srgbClr val="FFFFFF"/>
+                    </a:solidFill>
+                  </a:tcPr>
+                </a:tc>
+              </a:tr>
+              <a:tr h="384048">
+                <a:tc>
+                  <a:txBody>
+                    <a:bodyPr/>
+                    <a:lstStyle/>
+                    <a:p>
+                      <a:pPr algn="l"/>
+                      <a:r>
+                        <a:rPr sz="1100">
+                          <a:solidFill>
+                            <a:srgbClr val="222730"/>
+                          </a:solidFill>
+                        </a:rPr>
+                        <a:t>2</a:t>
+                      </a:r>
+                    </a:p>
+                  </a:txBody>
+                  <a:tcPr anchor="ctr" marT="12700" marB="12700">
+                    <a:solidFill>
+                      <a:srgbClr val="F2F4F8"/>
+                    </a:solidFill>
+                  </a:tcPr>
+                </a:tc>
+                <a:tc>
+                  <a:txBody>
+                    <a:bodyPr/>
+                    <a:lstStyle/>
+                    <a:p>
+                      <a:pPr algn="ctr"/>
+                      <a:r>
+                        <a:rPr sz="1100">
+                          <a:solidFill>
+                            <a:srgbClr val="222730"/>
+                          </a:solidFill>
+                        </a:rPr>
+                        <a:t>ID를 매 반복 랜덤 전체정렬 조회</a:t>
+                      </a:r>
+                    </a:p>
+                  </a:txBody>
+                  <a:tcPr anchor="ctr" marT="12700" marB="12700">
+                    <a:solidFill>
+                      <a:srgbClr val="F2F4F8"/>
+                    </a:solidFill>
+                  </a:tcPr>
+                </a:tc>
+                <a:tc>
+                  <a:txBody>
+                    <a:bodyPr/>
+                    <a:lstStyle/>
+                    <a:p>
+                      <a:pPr algn="ctr"/>
+                      <a:r>
+                        <a:rPr sz="1100">
+                          <a:solidFill>
+                            <a:srgbClr val="222730"/>
+                          </a:solidFill>
+                        </a:rPr>
+                        <a:t>제거 가능(가장 큰 비용)</a:t>
+                      </a:r>
+                    </a:p>
+                  </a:txBody>
+                  <a:tcPr anchor="ctr" marT="12700" marB="12700">
+                    <a:solidFill>
+                      <a:srgbClr val="F2F4F8"/>
+                    </a:solidFill>
+                  </a:tcPr>
+                </a:tc>
+              </a:tr>
+              <a:tr h="384048">
+                <a:tc>
+                  <a:txBody>
+                    <a:bodyPr/>
+                    <a:lstStyle/>
+                    <a:p>
+                      <a:pPr algn="l"/>
+                      <a:r>
+                        <a:rPr sz="1100">
+                          <a:solidFill>
+                            <a:srgbClr val="222730"/>
+                          </a:solidFill>
+                        </a:rPr>
+                        <a:t>3</a:t>
+                      </a:r>
+                    </a:p>
+                  </a:txBody>
+                  <a:tcPr anchor="ctr" marT="12700" marB="12700">
+                    <a:solidFill>
+                      <a:srgbClr val="FFFFFF"/>
+                    </a:solidFill>
+                  </a:tcPr>
+                </a:tc>
+                <a:tc>
+                  <a:txBody>
+                    <a:bodyPr/>
+                    <a:lstStyle/>
+                    <a:p>
+                      <a:pPr algn="ctr"/>
+                      <a:r>
+                        <a:rPr sz="1100">
+                          <a:solidFill>
+                            <a:srgbClr val="222730"/>
+                          </a:solidFill>
+                        </a:rPr>
+                        <a:t>주문당 1커밋 (log file sync)</a:t>
+                      </a:r>
+                    </a:p>
+                  </a:txBody>
+                  <a:tcPr anchor="ctr" marT="12700" marB="12700">
+                    <a:solidFill>
+                      <a:srgbClr val="FFFFFF"/>
+                    </a:solidFill>
+                  </a:tcPr>
+                </a:tc>
+                <a:tc>
+                  <a:txBody>
+                    <a:bodyPr/>
+                    <a:lstStyle/>
+                    <a:p>
+                      <a:pPr algn="ctr"/>
+                      <a:r>
+                        <a:rPr sz="1100">
+                          <a:solidFill>
+                            <a:srgbClr val="222730"/>
+                          </a:solidFill>
+                        </a:rPr>
+                        <a:t>제거 불가(구조적)</a:t>
+                      </a:r>
+                    </a:p>
+                  </a:txBody>
+                  <a:tcPr anchor="ctr" marT="12700" marB="12700">
+                    <a:solidFill>
+                      <a:srgbClr val="FFFFFF"/>
+                    </a:solidFill>
+                  </a:tcPr>
+                </a:tc>
+              </a:tr>
+            </a:tbl>
+          </a:graphicData>
+        </a:graphic>
+      </p:graphicFrame>
+    </p:spTree>
+  </p:cSld>
+  <p:clrMapOvr>
+    <a:masterClrMapping/>
+  </p:clrMapOvr>
+</p:sld>
+</file>
+
+<file path=ppt/slides/slide61.xml><?xml version="1.0" encoding="utf-8"?>
 <p:sld xmlns:a="http://schemas.openxmlformats.org/drawingml/2006/main" xmlns:p="http://schemas.openxmlformats.org/presentationml/2006/main" xmlns:r="http://schemas.openxmlformats.org/officeDocument/2006/relationships">
   <p:cSld>
     <p:spTree>
@@ -25158,7 +26371,7 @@
 </p:sld>
 </file>
 
-<file path=ppt/slides/slide58.xml><?xml version="1.0" encoding="utf-8"?>
+<file path=ppt/slides/slide62.xml><?xml version="1.0" encoding="utf-8"?>
 <p:sld xmlns:a="http://schemas.openxmlformats.org/drawingml/2006/main" xmlns:p="http://schemas.openxmlformats.org/presentationml/2006/main" xmlns:r="http://schemas.openxmlformats.org/officeDocument/2006/relationships">
   <p:cSld>
     <p:spTree>
@@ -25188,7 +26401,7 @@
             <a:pPr algn="r"/>
             <a:r>
               <a:rPr lang="en-US" altLang="ko-KR" sz="1600" dirty="0" smtClean="0"/>
-              <a:t>Cleanup</a:t>
+              <a:t>Improve</a:t>
             </a:r>
             <a:r>
               <a:rPr lang="ko-KR" altLang="en-US" sz="1600" dirty="0" smtClean="0"/>
@@ -25215,7 +26428,7 @@
           <a:p>
             <a:r>
               <a:rPr lang="ko-KR" altLang="en-US" dirty="0" smtClean="0"/>
-              <a:t>반복 테스트 데이터 삭제</a:t>
+              <a:t>개선 방안</a:t>
             </a:r>
             <a:r>
               <a:rPr lang="en-US" altLang="ko-KR" dirty="0" smtClean="0"/>
@@ -25258,198 +26471,7 @@
                   <a:srgbClr val="50646E"/>
                 </a:solidFill>
               </a:rPr>
-              <a:t>BATCH_RUN_LOG 구간으로 안전 삭제</a:t>
-            </a:r>
-            <a:r>
-              <a:rPr lang="ko-KR" altLang="en-US" sz="1600" dirty="0">
-                <a:solidFill>
-                  <a:srgbClr val="50646E"/>
-                </a:solidFill>
-              </a:rPr>
-              <a:t/>
-            </a:r>
-            <a:r>
-              <a:rPr lang="en-US" altLang="ko-KR" sz="1600" dirty="0">
-                <a:solidFill>
-                  <a:srgbClr val="50646E"/>
-                </a:solidFill>
-              </a:rPr>
-              <a:t/>
-            </a:r>
-          </a:p>
-        </p:txBody>
-      </p:sp>
-      <p:sp>
-        <p:nvSpPr>
-          <p:cNvPr id="11" name="내용 개체 틀 10"/>
-          <p:cNvSpPr>
-            <a:spLocks noGrp="1"/>
-          </p:cNvSpPr>
-          <p:nvPr>
-            <p:ph idx="13"/>
-          </p:nvPr>
-        </p:nvSpPr>
-        <p:spPr/>
-        <p:txBody>
-          <a:bodyPr wrap="square"/>
-          <a:lstStyle/>
-          <a:p>
-            <a:pPr>
-              <a:spcAft>
-                <a:spcPts val="600"/>
-              </a:spcAft>
-            </a:pPr>
-            <a:r>
-              <a:rPr sz="1500">
-                <a:solidFill>
-                  <a:srgbClr val="222730"/>
-                </a:solidFill>
-              </a:rPr>
-              <a:t>• 실행마다 시작~종료 ORDER_ID 구간을 BATCH_RUN_LOG에 기록</a:t>
-            </a:r>
-            <a:endParaRPr lang="ko-KR" altLang="en-US" dirty="0"/>
-          </a:p>
-          <a:p>
-            <a:pPr>
-              <a:spcAft>
-                <a:spcPts val="600"/>
-              </a:spcAft>
-            </a:pPr>
-            <a:r>
-              <a:rPr sz="1500">
-                <a:solidFill>
-                  <a:srgbClr val="222730"/>
-                </a:solidFill>
-              </a:rPr>
-              <a:t>• 자식→부모 순서(SHIPMENTS→ORDER_ITEMS→ORDERS)로 삭제 → FK 위반 방지</a:t>
-            </a:r>
-          </a:p>
-          <a:p>
-            <a:pPr>
-              <a:spcAft>
-                <a:spcPts val="600"/>
-              </a:spcAft>
-            </a:pPr>
-            <a:r>
-              <a:rPr sz="1500">
-                <a:solidFill>
-                  <a:srgbClr val="222730"/>
-                </a:solidFill>
-              </a:rPr>
-              <a:t>• CLEANUP_BATCH_RUN(run_id) 프로시저로 특정 실행분만 정리</a:t>
-            </a:r>
-          </a:p>
-        </p:txBody>
-      </p:sp>
-    </p:spTree>
-  </p:cSld>
-  <p:clrMapOvr>
-    <a:masterClrMapping/>
-  </p:clrMapOvr>
-</p:sld>
-</file>
-
-<file path=ppt/slides/slide59.xml><?xml version="1.0" encoding="utf-8"?>
-<p:sld xmlns:a="http://schemas.openxmlformats.org/drawingml/2006/main" xmlns:p="http://schemas.openxmlformats.org/presentationml/2006/main" xmlns:r="http://schemas.openxmlformats.org/officeDocument/2006/relationships">
-  <p:cSld>
-    <p:spTree>
-      <p:nvGrpSpPr>
-        <p:cNvPr id="1" name=""/>
-        <p:cNvGrpSpPr/>
-        <p:nvPr/>
-      </p:nvGrpSpPr>
-      <p:grpSpPr/>
-      <p:sp>
-        <p:nvSpPr>
-          <p:cNvPr id="4" name="텍스트 개체 틀 3"/>
-          <p:cNvSpPr>
-            <a:spLocks noGrp="1"/>
-          </p:cNvSpPr>
-          <p:nvPr>
-            <p:ph type="body" sz="quarter" idx="10"/>
-          </p:nvPr>
-        </p:nvSpPr>
-        <p:spPr/>
-        <p:txBody>
-          <a:bodyPr>
-            <a:normAutofit/>
-          </a:bodyPr>
-          <a:lstStyle/>
-          <a:p>
-            <a:pPr algn="r"/>
-            <a:r>
-              <a:rPr lang="en-US" altLang="ko-KR" sz="1600" dirty="0" smtClean="0"/>
-              <a:t>Bottleneck</a:t>
-            </a:r>
-            <a:r>
-              <a:rPr lang="ko-KR" altLang="en-US" sz="1600" dirty="0" smtClean="0"/>
-              <a:t/>
-            </a:r>
-            <a:endParaRPr lang="ko-KR" altLang="en-US" sz="1600" dirty="0"/>
-          </a:p>
-        </p:txBody>
-      </p:sp>
-      <p:sp>
-        <p:nvSpPr>
-          <p:cNvPr id="5" name="텍스트 개체 틀 4"/>
-          <p:cNvSpPr>
-            <a:spLocks noGrp="1"/>
-          </p:cNvSpPr>
-          <p:nvPr>
-            <p:ph type="body" sz="quarter" idx="11"/>
-          </p:nvPr>
-        </p:nvSpPr>
-        <p:spPr/>
-        <p:txBody>
-          <a:bodyPr/>
-          <a:lstStyle/>
-          <a:p>
-            <a:r>
-              <a:rPr lang="ko-KR" altLang="en-US" dirty="0" smtClean="0"/>
-              <a:t>병목 분석</a:t>
-            </a:r>
-            <a:r>
-              <a:rPr lang="en-US" altLang="ko-KR" dirty="0" smtClean="0"/>
-              <a:t/>
-            </a:r>
-            <a:endParaRPr lang="ko-KR" altLang="en-US" dirty="0"/>
-          </a:p>
-        </p:txBody>
-      </p:sp>
-      <p:sp>
-        <p:nvSpPr>
-          <p:cNvPr id="10" name="텍스트 개체 틀 4"/>
-          <p:cNvSpPr>
-            <a:spLocks noGrp="1"/>
-          </p:cNvSpPr>
-          <p:nvPr>
-            <p:ph type="body" sz="quarter" idx="12"/>
-          </p:nvPr>
-        </p:nvSpPr>
-        <p:spPr>
-          <a:xfrm>
-            <a:off x="234132" y="828303"/>
-            <a:ext cx="7956884" cy="835266"/>
-          </a:xfrm>
-        </p:spPr>
-        <p:txBody>
-          <a:bodyPr vert="horz" lIns="91440" tIns="45720" rIns="91440" bIns="45720" rtlCol="0">
-            <a:normAutofit/>
-          </a:bodyPr>
-          <a:lstStyle/>
-          <a:p>
-            <a:pPr defTabSz="914400">
-              <a:spcBef>
-                <a:spcPct val="20000"/>
-              </a:spcBef>
-            </a:pPr>
-            <a:r>
-              <a:rPr lang="en-US" altLang="ko-KR" sz="1600" dirty="0">
-                <a:solidFill>
-                  <a:srgbClr val="50646E"/>
-                </a:solidFill>
-              </a:rPr>
-              <a:t>제거 가능 2가지 vs 구조적 1가지</a:t>
+              <a:t>채번·조회는 제거, 커밋은 완화만 검토</a:t>
             </a:r>
             <a:r>
               <a:rPr lang="ko-KR" altLang="en-US" sz="1600" dirty="0">
@@ -25506,7 +26528,7 @@
                             <a:srgbClr val="FFFFFF"/>
                           </a:solidFill>
                         </a:rPr>
-                        <a:t>#</a:t>
+                        <a:t>병목</a:t>
                       </a:r>
                     </a:p>
                   </a:txBody>
@@ -25528,7 +26550,7 @@
                             <a:srgbClr val="FFFFFF"/>
                           </a:solidFill>
                         </a:rPr>
-                        <a:t>병목</a:t>
+                        <a:t>개선</a:t>
                       </a:r>
                     </a:p>
                   </a:txBody>
@@ -25550,7 +26572,7 @@
                             <a:srgbClr val="FFFFFF"/>
                           </a:solidFill>
                         </a:rPr>
-                        <a:t>성격</a:t>
+                        <a:t>관련 개념</a:t>
                       </a:r>
                     </a:p>
                   </a:txBody>
@@ -25574,7 +26596,7 @@
                             <a:srgbClr val="222730"/>
                           </a:solidFill>
                         </a:rPr>
-                        <a:t>1</a:t>
+                        <a:t>채번 재조회</a:t>
                       </a:r>
                     </a:p>
                   </a:txBody>
@@ -25596,7 +26618,7 @@
                             <a:srgbClr val="222730"/>
                           </a:solidFill>
                         </a:rPr>
-                        <a:t>MAX(ORDER_ID)+1 매 반복 재조회</a:t>
+                        <a:t>SEQUENCE CACHE 1000</a:t>
                       </a:r>
                     </a:p>
                   </a:txBody>
@@ -25618,7 +26640,7 @@
                             <a:srgbClr val="222730"/>
                           </a:solidFill>
                         </a:rPr>
-                        <a:t>제거 가능(설계 결함)</a:t>
+                        <a:t>시퀀스 캐시·원자성</a:t>
                       </a:r>
                     </a:p>
                   </a:txBody>
@@ -25642,7 +26664,7 @@
                             <a:srgbClr val="222730"/>
                           </a:solidFill>
                         </a:rPr>
-                        <a:t>2</a:t>
+                        <a:t>랜덤 전체정렬</a:t>
                       </a:r>
                     </a:p>
                   </a:txBody>
@@ -25664,7 +26686,7 @@
                             <a:srgbClr val="222730"/>
                           </a:solidFill>
                         </a:rPr>
-                        <a:t>ID를 매 반복 랜덤 전체정렬 조회</a:t>
+                        <a:t>BULK COLLECT 배열</a:t>
                       </a:r>
                     </a:p>
                   </a:txBody>
@@ -25686,7 +26708,7 @@
                             <a:srgbClr val="222730"/>
                           </a:solidFill>
                         </a:rPr>
-                        <a:t>제거 가능(가장 큰 비용)</a:t>
+                        <a:t>집합적 처리</a:t>
                       </a:r>
                     </a:p>
                   </a:txBody>
@@ -25710,7 +26732,7 @@
                             <a:srgbClr val="222730"/>
                           </a:solidFill>
                         </a:rPr>
-                        <a:t>3</a:t>
+                        <a:t>건별 커밋</a:t>
                       </a:r>
                     </a:p>
                   </a:txBody>
@@ -25732,7 +26754,7 @@
                             <a:srgbClr val="222730"/>
                           </a:solidFill>
                         </a:rPr>
-                        <a:t>주문당 1커밋 (log file sync)</a:t>
+                        <a:t>요구사항상 제거 불가</a:t>
                       </a:r>
                     </a:p>
                   </a:txBody>
@@ -25754,7 +26776,7 @@
                             <a:srgbClr val="222730"/>
                           </a:solidFill>
                         </a:rPr>
-                        <a:t>제거 불가(구조적)</a:t>
+                        <a:t>Durability·log file sync</a:t>
                       </a:r>
                     </a:p>
                   </a:txBody>
@@ -25777,567 +26799,7 @@
 </p:sld>
 </file>
 
-<file path=ppt/slides/slide6.xml><?xml version="1.0" encoding="utf-8"?>
-<p:sld xmlns:a="http://schemas.openxmlformats.org/drawingml/2006/main" xmlns:p="http://schemas.openxmlformats.org/presentationml/2006/main" xmlns:r="http://schemas.openxmlformats.org/officeDocument/2006/relationships">
-  <p:cSld>
-    <p:spTree>
-      <p:nvGrpSpPr>
-        <p:cNvPr id="1" name=""/>
-        <p:cNvGrpSpPr/>
-        <p:nvPr/>
-      </p:nvGrpSpPr>
-      <p:grpSpPr/>
-      <p:sp>
-        <p:nvSpPr>
-          <p:cNvPr id="4" name="제목 3"/>
-          <p:cNvSpPr>
-            <a:spLocks noGrp="1"/>
-          </p:cNvSpPr>
-          <p:nvPr>
-            <p:ph type="title"/>
-          </p:nvPr>
-        </p:nvSpPr>
-        <p:spPr/>
-        <p:txBody>
-          <a:bodyPr/>
-          <a:lstStyle/>
-          <a:p>
-            <a:r>
-              <a:rPr lang="ko-KR" altLang="en-US" dirty="0"/>
-              <a:t>스키마 분석 및 트랜잭션 시뮬레이션</a:t>
-            </a:r>
-            <a:r>
-              <a:rPr lang="en-US" altLang="ko-KR" dirty="0"/>
-              <a:t/>
-            </a:r>
-            <a:br>
-              <a:rPr lang="en-US" altLang="ko-KR" dirty="0"/>
-            </a:br>
-            <a:r>
-              <a:rPr lang="ko-KR" altLang="en-US" dirty="0"/>
-              <a:t/>
-            </a:r>
-          </a:p>
-        </p:txBody>
-      </p:sp>
-      <p:sp>
-        <p:nvSpPr>
-          <p:cNvPr id="5" name="텍스트 개체 틀 4"/>
-          <p:cNvSpPr>
-            <a:spLocks noGrp="1"/>
-          </p:cNvSpPr>
-          <p:nvPr>
-            <p:ph type="body" sz="quarter" idx="10"/>
-          </p:nvPr>
-        </p:nvSpPr>
-        <p:spPr/>
-        <p:txBody>
-          <a:bodyPr anchor="ctr"/>
-          <a:lstStyle/>
-          <a:p>
-            <a:pPr>
-              <a:lnSpc>
-                <a:spcPct val="150000"/>
-              </a:lnSpc>
-            </a:pPr>
-            <a:r>
-              <a:rPr lang="en-US" altLang="ko-KR" dirty="0">
-                <a:latin typeface="다키 L" pitchFamily="2" charset="-127"/>
-                <a:ea typeface="다키 L" pitchFamily="2" charset="-127"/>
-              </a:rPr>
-              <a:t>1) BO 스키마·ERD 역공학   2) 트랜잭션 T1~T7 ACID 검증   3) 데이터 이상치 탐지</a:t>
-            </a:r>
-            <a:r>
-              <a:rPr lang="ko-KR" altLang="en-US" dirty="0">
-                <a:latin typeface="다키 L" pitchFamily="2" charset="-127"/>
-                <a:ea typeface="다키 L" pitchFamily="2" charset="-127"/>
-              </a:rPr>
-              <a:t/>
-            </a:r>
-            <a:r>
-              <a:rPr lang="en-US" altLang="ko-KR" dirty="0">
-                <a:latin typeface="다키 L" pitchFamily="2" charset="-127"/>
-                <a:ea typeface="다키 L" pitchFamily="2" charset="-127"/>
-              </a:rPr>
-              <a:t/>
-            </a:r>
-          </a:p>
-        </p:txBody>
-      </p:sp>
-      <p:sp>
-        <p:nvSpPr>
-          <p:cNvPr id="6" name="텍스트 개체 틀 5"/>
-          <p:cNvSpPr>
-            <a:spLocks noGrp="1"/>
-          </p:cNvSpPr>
-          <p:nvPr>
-            <p:ph type="body" sz="quarter" idx="11"/>
-          </p:nvPr>
-        </p:nvSpPr>
-        <p:spPr/>
-        <p:txBody>
-          <a:bodyPr>
-            <a:noAutofit/>
-          </a:bodyPr>
-          <a:lstStyle/>
-          <a:p>
-            <a:r>
-              <a:rPr lang="en-US" altLang="ko-KR" sz="6000" dirty="0" smtClean="0">
-                <a:solidFill>
-                  <a:srgbClr val="2484C6"/>
-                </a:solidFill>
-                <a:latin typeface="다키 M Title" pitchFamily="2" charset="-127"/>
-                <a:ea typeface="다키 M Title" pitchFamily="2" charset="-127"/>
-              </a:rPr>
-              <a:t>01</a:t>
-            </a:r>
-            <a:endParaRPr lang="ko-KR" altLang="en-US" sz="6000" dirty="0">
-              <a:solidFill>
-                <a:srgbClr val="2484C6"/>
-              </a:solidFill>
-              <a:latin typeface="다키 M Title" pitchFamily="2" charset="-127"/>
-              <a:ea typeface="다키 M Title" pitchFamily="2" charset="-127"/>
-            </a:endParaRPr>
-          </a:p>
-        </p:txBody>
-      </p:sp>
-    </p:spTree>
-  </p:cSld>
-  <p:clrMapOvr>
-    <a:masterClrMapping/>
-  </p:clrMapOvr>
-</p:sld>
-</file>
-
-<file path=ppt/slides/slide60.xml><?xml version="1.0" encoding="utf-8"?>
-<p:sld xmlns:a="http://schemas.openxmlformats.org/drawingml/2006/main" xmlns:p="http://schemas.openxmlformats.org/presentationml/2006/main" xmlns:r="http://schemas.openxmlformats.org/officeDocument/2006/relationships">
-  <p:cSld>
-    <p:spTree>
-      <p:nvGrpSpPr>
-        <p:cNvPr id="1" name=""/>
-        <p:cNvGrpSpPr/>
-        <p:nvPr/>
-      </p:nvGrpSpPr>
-      <p:grpSpPr/>
-      <p:sp>
-        <p:nvSpPr>
-          <p:cNvPr id="4" name="텍스트 개체 틀 3"/>
-          <p:cNvSpPr>
-            <a:spLocks noGrp="1"/>
-          </p:cNvSpPr>
-          <p:nvPr>
-            <p:ph type="body" sz="quarter" idx="10"/>
-          </p:nvPr>
-        </p:nvSpPr>
-        <p:spPr/>
-        <p:txBody>
-          <a:bodyPr>
-            <a:normAutofit/>
-          </a:bodyPr>
-          <a:lstStyle/>
-          <a:p>
-            <a:pPr algn="r"/>
-            <a:r>
-              <a:rPr lang="en-US" altLang="ko-KR" sz="1600" dirty="0" smtClean="0"/>
-              <a:t>Improve</a:t>
-            </a:r>
-            <a:r>
-              <a:rPr lang="ko-KR" altLang="en-US" sz="1600" dirty="0" smtClean="0"/>
-              <a:t/>
-            </a:r>
-            <a:endParaRPr lang="ko-KR" altLang="en-US" sz="1600" dirty="0"/>
-          </a:p>
-        </p:txBody>
-      </p:sp>
-      <p:sp>
-        <p:nvSpPr>
-          <p:cNvPr id="5" name="텍스트 개체 틀 4"/>
-          <p:cNvSpPr>
-            <a:spLocks noGrp="1"/>
-          </p:cNvSpPr>
-          <p:nvPr>
-            <p:ph type="body" sz="quarter" idx="11"/>
-          </p:nvPr>
-        </p:nvSpPr>
-        <p:spPr/>
-        <p:txBody>
-          <a:bodyPr/>
-          <a:lstStyle/>
-          <a:p>
-            <a:r>
-              <a:rPr lang="ko-KR" altLang="en-US" dirty="0" smtClean="0"/>
-              <a:t>개선 방안</a:t>
-            </a:r>
-            <a:r>
-              <a:rPr lang="en-US" altLang="ko-KR" dirty="0" smtClean="0"/>
-              <a:t/>
-            </a:r>
-            <a:endParaRPr lang="ko-KR" altLang="en-US" dirty="0"/>
-          </a:p>
-        </p:txBody>
-      </p:sp>
-      <p:sp>
-        <p:nvSpPr>
-          <p:cNvPr id="10" name="텍스트 개체 틀 4"/>
-          <p:cNvSpPr>
-            <a:spLocks noGrp="1"/>
-          </p:cNvSpPr>
-          <p:nvPr>
-            <p:ph type="body" sz="quarter" idx="12"/>
-          </p:nvPr>
-        </p:nvSpPr>
-        <p:spPr>
-          <a:xfrm>
-            <a:off x="234132" y="828303"/>
-            <a:ext cx="7956884" cy="835266"/>
-          </a:xfrm>
-        </p:spPr>
-        <p:txBody>
-          <a:bodyPr vert="horz" lIns="91440" tIns="45720" rIns="91440" bIns="45720" rtlCol="0">
-            <a:normAutofit/>
-          </a:bodyPr>
-          <a:lstStyle/>
-          <a:p>
-            <a:pPr defTabSz="914400">
-              <a:spcBef>
-                <a:spcPct val="20000"/>
-              </a:spcBef>
-            </a:pPr>
-            <a:r>
-              <a:rPr lang="en-US" altLang="ko-KR" sz="1600" dirty="0">
-                <a:solidFill>
-                  <a:srgbClr val="50646E"/>
-                </a:solidFill>
-              </a:rPr>
-              <a:t>채번·조회는 제거, 커밋은 완화만 검토</a:t>
-            </a:r>
-            <a:r>
-              <a:rPr lang="ko-KR" altLang="en-US" sz="1600" dirty="0">
-                <a:solidFill>
-                  <a:srgbClr val="50646E"/>
-                </a:solidFill>
-              </a:rPr>
-              <a:t/>
-            </a:r>
-            <a:r>
-              <a:rPr lang="en-US" altLang="ko-KR" sz="1600" dirty="0">
-                <a:solidFill>
-                  <a:srgbClr val="50646E"/>
-                </a:solidFill>
-              </a:rPr>
-              <a:t/>
-            </a:r>
-          </a:p>
-        </p:txBody>
-      </p:sp>
-      <p:graphicFrame>
-        <p:nvGraphicFramePr>
-          <p:cNvPr id="11" name="Table 10"/>
-          <p:cNvGraphicFramePr>
-            <a:graphicFrameLocks noGrp="1"/>
-          </p:cNvGraphicFramePr>
-          <p:nvPr/>
-        </p:nvGraphicFramePr>
-        <p:xfrm>
-          <a:off x="317624" y="1764296"/>
-          <a:ext cx="10058400" cy="1536192"/>
-        </p:xfrm>
-        <a:graphic>
-          <a:graphicData uri="http://schemas.openxmlformats.org/drawingml/2006/table">
-            <a:tbl>
-              <a:tblPr firstRow="1" bandRow="1">
-                <a:tableStyleId>{5C22544A-7EE6-4342-B048-85BDC9FD1C3A}</a:tableStyleId>
-              </a:tblPr>
-              <a:tblGrid>
-                <a:gridCol w="3352800"/>
-                <a:gridCol w="3352800"/>
-                <a:gridCol w="3352800"/>
-              </a:tblGrid>
-              <a:tr h="384048">
-                <a:tc>
-                  <a:txBody>
-                    <a:bodyPr/>
-                    <a:lstStyle/>
-                    <a:p>
-                      <a:pPr algn="ctr"/>
-                      <a:r>
-                        <a:rPr b="1" sz="1150">
-                          <a:solidFill>
-                            <a:srgbClr val="FFFFFF"/>
-                          </a:solidFill>
-                        </a:rPr>
-                        <a:t>병목</a:t>
-                      </a:r>
-                    </a:p>
-                  </a:txBody>
-                  <a:tcPr anchor="ctr" marT="25400" marB="25400">
-                    <a:solidFill>
-                      <a:srgbClr val="1B2A4A"/>
-                    </a:solidFill>
-                  </a:tcPr>
-                </a:tc>
-                <a:tc>
-                  <a:txBody>
-                    <a:bodyPr/>
-                    <a:lstStyle/>
-                    <a:p>
-                      <a:pPr algn="ctr"/>
-                      <a:r>
-                        <a:rPr b="1" sz="1150">
-                          <a:solidFill>
-                            <a:srgbClr val="FFFFFF"/>
-                          </a:solidFill>
-                        </a:rPr>
-                        <a:t>개선</a:t>
-                      </a:r>
-                    </a:p>
-                  </a:txBody>
-                  <a:tcPr anchor="ctr" marT="25400" marB="25400">
-                    <a:solidFill>
-                      <a:srgbClr val="1B2A4A"/>
-                    </a:solidFill>
-                  </a:tcPr>
-                </a:tc>
-                <a:tc>
-                  <a:txBody>
-                    <a:bodyPr/>
-                    <a:lstStyle/>
-                    <a:p>
-                      <a:pPr algn="ctr"/>
-                      <a:r>
-                        <a:rPr b="1" sz="1150">
-                          <a:solidFill>
-                            <a:srgbClr val="FFFFFF"/>
-                          </a:solidFill>
-                        </a:rPr>
-                        <a:t>관련 개념</a:t>
-                      </a:r>
-                    </a:p>
-                  </a:txBody>
-                  <a:tcPr anchor="ctr" marT="25400" marB="25400">
-                    <a:solidFill>
-                      <a:srgbClr val="1B2A4A"/>
-                    </a:solidFill>
-                  </a:tcPr>
-                </a:tc>
-              </a:tr>
-              <a:tr h="384048">
-                <a:tc>
-                  <a:txBody>
-                    <a:bodyPr/>
-                    <a:lstStyle/>
-                    <a:p>
-                      <a:pPr algn="l"/>
-                      <a:r>
-                        <a:rPr sz="1100">
-                          <a:solidFill>
-                            <a:srgbClr val="222730"/>
-                          </a:solidFill>
-                        </a:rPr>
-                        <a:t>채번 재조회</a:t>
-                      </a:r>
-                    </a:p>
-                  </a:txBody>
-                  <a:tcPr anchor="ctr" marT="12700" marB="12700">
-                    <a:solidFill>
-                      <a:srgbClr val="FFFFFF"/>
-                    </a:solidFill>
-                  </a:tcPr>
-                </a:tc>
-                <a:tc>
-                  <a:txBody>
-                    <a:bodyPr/>
-                    <a:lstStyle/>
-                    <a:p>
-                      <a:pPr algn="ctr"/>
-                      <a:r>
-                        <a:rPr sz="1100">
-                          <a:solidFill>
-                            <a:srgbClr val="222730"/>
-                          </a:solidFill>
-                        </a:rPr>
-                        <a:t>SEQUENCE CACHE 1000</a:t>
-                      </a:r>
-                    </a:p>
-                  </a:txBody>
-                  <a:tcPr anchor="ctr" marT="12700" marB="12700">
-                    <a:solidFill>
-                      <a:srgbClr val="FFFFFF"/>
-                    </a:solidFill>
-                  </a:tcPr>
-                </a:tc>
-                <a:tc>
-                  <a:txBody>
-                    <a:bodyPr/>
-                    <a:lstStyle/>
-                    <a:p>
-                      <a:pPr algn="ctr"/>
-                      <a:r>
-                        <a:rPr sz="1100">
-                          <a:solidFill>
-                            <a:srgbClr val="222730"/>
-                          </a:solidFill>
-                        </a:rPr>
-                        <a:t>시퀀스 캐시·원자성</a:t>
-                      </a:r>
-                    </a:p>
-                  </a:txBody>
-                  <a:tcPr anchor="ctr" marT="12700" marB="12700">
-                    <a:solidFill>
-                      <a:srgbClr val="FFFFFF"/>
-                    </a:solidFill>
-                  </a:tcPr>
-                </a:tc>
-              </a:tr>
-              <a:tr h="384048">
-                <a:tc>
-                  <a:txBody>
-                    <a:bodyPr/>
-                    <a:lstStyle/>
-                    <a:p>
-                      <a:pPr algn="l"/>
-                      <a:r>
-                        <a:rPr sz="1100">
-                          <a:solidFill>
-                            <a:srgbClr val="222730"/>
-                          </a:solidFill>
-                        </a:rPr>
-                        <a:t>랜덤 전체정렬</a:t>
-                      </a:r>
-                    </a:p>
-                  </a:txBody>
-                  <a:tcPr anchor="ctr" marT="12700" marB="12700">
-                    <a:solidFill>
-                      <a:srgbClr val="F2F4F8"/>
-                    </a:solidFill>
-                  </a:tcPr>
-                </a:tc>
-                <a:tc>
-                  <a:txBody>
-                    <a:bodyPr/>
-                    <a:lstStyle/>
-                    <a:p>
-                      <a:pPr algn="ctr"/>
-                      <a:r>
-                        <a:rPr sz="1100">
-                          <a:solidFill>
-                            <a:srgbClr val="222730"/>
-                          </a:solidFill>
-                        </a:rPr>
-                        <a:t>BULK COLLECT 배열</a:t>
-                      </a:r>
-                    </a:p>
-                  </a:txBody>
-                  <a:tcPr anchor="ctr" marT="12700" marB="12700">
-                    <a:solidFill>
-                      <a:srgbClr val="F2F4F8"/>
-                    </a:solidFill>
-                  </a:tcPr>
-                </a:tc>
-                <a:tc>
-                  <a:txBody>
-                    <a:bodyPr/>
-                    <a:lstStyle/>
-                    <a:p>
-                      <a:pPr algn="ctr"/>
-                      <a:r>
-                        <a:rPr sz="1100">
-                          <a:solidFill>
-                            <a:srgbClr val="222730"/>
-                          </a:solidFill>
-                        </a:rPr>
-                        <a:t>집합적 처리</a:t>
-                      </a:r>
-                    </a:p>
-                  </a:txBody>
-                  <a:tcPr anchor="ctr" marT="12700" marB="12700">
-                    <a:solidFill>
-                      <a:srgbClr val="F2F4F8"/>
-                    </a:solidFill>
-                  </a:tcPr>
-                </a:tc>
-              </a:tr>
-              <a:tr h="384048">
-                <a:tc>
-                  <a:txBody>
-                    <a:bodyPr/>
-                    <a:lstStyle/>
-                    <a:p>
-                      <a:pPr algn="l"/>
-                      <a:r>
-                        <a:rPr sz="1100">
-                          <a:solidFill>
-                            <a:srgbClr val="222730"/>
-                          </a:solidFill>
-                        </a:rPr>
-                        <a:t>건별 커밋</a:t>
-                      </a:r>
-                    </a:p>
-                  </a:txBody>
-                  <a:tcPr anchor="ctr" marT="12700" marB="12700">
-                    <a:solidFill>
-                      <a:srgbClr val="FFFFFF"/>
-                    </a:solidFill>
-                  </a:tcPr>
-                </a:tc>
-                <a:tc>
-                  <a:txBody>
-                    <a:bodyPr/>
-                    <a:lstStyle/>
-                    <a:p>
-                      <a:pPr algn="ctr"/>
-                      <a:r>
-                        <a:rPr sz="1100">
-                          <a:solidFill>
-                            <a:srgbClr val="222730"/>
-                          </a:solidFill>
-                        </a:rPr>
-                        <a:t>요구사항상 제거 불가</a:t>
-                      </a:r>
-                    </a:p>
-                  </a:txBody>
-                  <a:tcPr anchor="ctr" marT="12700" marB="12700">
-                    <a:solidFill>
-                      <a:srgbClr val="FFFFFF"/>
-                    </a:solidFill>
-                  </a:tcPr>
-                </a:tc>
-                <a:tc>
-                  <a:txBody>
-                    <a:bodyPr/>
-                    <a:lstStyle/>
-                    <a:p>
-                      <a:pPr algn="ctr"/>
-                      <a:r>
-                        <a:rPr sz="1100">
-                          <a:solidFill>
-                            <a:srgbClr val="222730"/>
-                          </a:solidFill>
-                        </a:rPr>
-                        <a:t>Durability·log file sync</a:t>
-                      </a:r>
-                    </a:p>
-                  </a:txBody>
-                  <a:tcPr anchor="ctr" marT="12700" marB="12700">
-                    <a:solidFill>
-                      <a:srgbClr val="FFFFFF"/>
-                    </a:solidFill>
-                  </a:tcPr>
-                </a:tc>
-              </a:tr>
-            </a:tbl>
-          </a:graphicData>
-        </a:graphic>
-      </p:graphicFrame>
-    </p:spTree>
-  </p:cSld>
-  <p:clrMapOvr>
-    <a:masterClrMapping/>
-  </p:clrMapOvr>
-</p:sld>
-</file>
-
-<file path=ppt/slides/slide61.xml><?xml version="1.0" encoding="utf-8"?>
+<file path=ppt/slides/slide63.xml><?xml version="1.0" encoding="utf-8"?>
 <p:sld xmlns:a="http://schemas.openxmlformats.org/drawingml/2006/main" xmlns:p="http://schemas.openxmlformats.org/presentationml/2006/main" xmlns:r="http://schemas.openxmlformats.org/officeDocument/2006/relationships">
   <p:cSld>
     <p:spTree>
@@ -26573,7 +27035,7 @@
 </p:sld>
 </file>
 
-<file path=ppt/slides/slide62.xml><?xml version="1.0" encoding="utf-8"?>
+<file path=ppt/slides/slide64.xml><?xml version="1.0" encoding="utf-8"?>
 <p:sld xmlns:a="http://schemas.openxmlformats.org/drawingml/2006/main" xmlns:p="http://schemas.openxmlformats.org/presentationml/2006/main" xmlns:r="http://schemas.openxmlformats.org/officeDocument/2006/relationships">
   <p:cSld>
     <p:spTree>
@@ -26764,7 +27226,7 @@
 </p:sld>
 </file>
 
-<file path=ppt/slides/slide63.xml><?xml version="1.0" encoding="utf-8"?>
+<file path=ppt/slides/slide65.xml><?xml version="1.0" encoding="utf-8"?>
 <p:sld xmlns:a="http://schemas.openxmlformats.org/drawingml/2006/main" xmlns:p="http://schemas.openxmlformats.org/presentationml/2006/main" xmlns:r="http://schemas.openxmlformats.org/officeDocument/2006/relationships">
   <p:cSld>
     <p:spTree>
@@ -26864,7 +27326,7 @@
                   <a:srgbClr val="50646E"/>
                 </a:solidFill>
               </a:rPr>
-              <a:t>4개 Part를 관통하는 실무 교훈</a:t>
+              <a:t>5개 Part를 관통하는 실무 교훈</a:t>
             </a:r>
             <a:r>
               <a:rPr lang="ko-KR" altLang="en-US" sz="1600" dirty="0">
@@ -26957,7 +27419,22 @@
                   <a:srgbClr val="222730"/>
                 </a:solidFill>
               </a:rPr>
-              <a:t>• 복구/배치: 사전 격리 설계와 병목의 구조적 구분이 핵심</a:t>
+              <a:t>• 백업/복구: 사전 테이블스페이스 격리 설계가 무중단 복구의 전제</a:t>
+            </a:r>
+          </a:p>
+          <a:p>
+            <a:pPr>
+              <a:spcAft>
+                <a:spcPts val="600"/>
+              </a:spcAft>
+            </a:pPr>
+            <a:r>
+              <a:rPr sz="1500">
+                <a:solidFill>
+                  <a:srgbClr val="222730"/>
+                </a:solidFill>
+              </a:rPr>
+              <a:t>• 배치: 정합성은 설계로, 병목은 제거 가능/구조적으로 구분</a:t>
             </a:r>
           </a:p>
         </p:txBody>

--- a/ppt/BO_DB운영_발표.pptx
+++ b/ppt/BO_DB운영_발표.pptx
@@ -25406,7 +25406,7 @@
                     <a:p>
                       <a:pPr algn="ctr"/>
                       <a:r>
-                        <a:rPr b="1" sz="1150">
+                        <a:rPr b="1" sz="1100">
                           <a:solidFill>
                             <a:srgbClr val="FFFFFF"/>
                           </a:solidFill>
@@ -25428,7 +25428,7 @@
                     <a:p>
                       <a:pPr algn="ctr"/>
                       <a:r>
-                        <a:rPr b="1" sz="1150">
+                        <a:rPr b="1" sz="1100">
                           <a:solidFill>
                             <a:srgbClr val="FFFFFF"/>
                           </a:solidFill>
@@ -25450,7 +25450,7 @@
                     <a:p>
                       <a:pPr algn="ctr"/>
                       <a:r>
-                        <a:rPr b="1" sz="1150">
+                        <a:rPr b="1" sz="1100">
                           <a:solidFill>
                             <a:srgbClr val="FFFFFF"/>
                           </a:solidFill>
@@ -25474,7 +25474,7 @@
                     <a:p>
                       <a:pPr algn="l"/>
                       <a:r>
-                        <a:rPr sz="1100">
+                        <a:rPr sz="1050">
                           <a:solidFill>
                             <a:srgbClr val="222730"/>
                           </a:solidFill>
@@ -25496,7 +25496,7 @@
                     <a:p>
                       <a:pPr algn="ctr"/>
                       <a:r>
-                        <a:rPr sz="1100">
+                        <a:rPr sz="1050">
                           <a:solidFill>
                             <a:srgbClr val="222730"/>
                           </a:solidFill>
@@ -25518,7 +25518,7 @@
                     <a:p>
                       <a:pPr algn="ctr"/>
                       <a:r>
-                        <a:rPr sz="1100">
+                        <a:rPr sz="1050">
                           <a:solidFill>
                             <a:srgbClr val="222730"/>
                           </a:solidFill>
@@ -25542,12 +25542,12 @@
                     <a:p>
                       <a:pPr algn="l"/>
                       <a:r>
-                        <a:rPr sz="1100">
-                          <a:solidFill>
-                            <a:srgbClr val="222730"/>
-                          </a:solidFill>
-                        </a:rPr>
-                        <a:t>비업무(스크래치)</a:t>
+                        <a:rPr sz="1050">
+                          <a:solidFill>
+                            <a:srgbClr val="222730"/>
+                          </a:solidFill>
+                        </a:rPr>
+                        <a:t>보조 테이블</a:t>
                       </a:r>
                     </a:p>
                   </a:txBody>
@@ -25564,7 +25564,7 @@
                     <a:p>
                       <a:pPr algn="ctr"/>
                       <a:r>
-                        <a:rPr sz="1100">
+                        <a:rPr sz="1050">
                           <a:solidFill>
                             <a:srgbClr val="222730"/>
                           </a:solidFill>
@@ -25586,12 +25586,12 @@
                     <a:p>
                       <a:pPr algn="ctr"/>
                       <a:r>
-                        <a:rPr sz="1100">
-                          <a:solidFill>
-                            <a:srgbClr val="222730"/>
-                          </a:solidFill>
-                        </a:rPr>
-                        <a:t>실습 보조</a:t>
+                        <a:rPr sz="1050">
+                          <a:solidFill>
+                            <a:srgbClr val="222730"/>
+                          </a:solidFill>
+                        </a:rPr>
+                        <a:t>BO_TEST·PERF_STAT·PERF_STAT_P·TBL_IDX01</a:t>
                       </a:r>
                     </a:p>
                   </a:txBody>
@@ -25610,12 +25610,12 @@
                     <a:p>
                       <a:pPr algn="l"/>
                       <a:r>
-                        <a:rPr sz="1100">
-                          <a:solidFill>
-                            <a:srgbClr val="222730"/>
-                          </a:solidFill>
-                        </a:rPr>
-                        <a:t>FK 관계</a:t>
+                        <a:rPr sz="1050">
+                          <a:solidFill>
+                            <a:srgbClr val="222730"/>
+                          </a:solidFill>
+                        </a:rPr>
+                        <a:t>원본 / 실습 후</a:t>
                       </a:r>
                     </a:p>
                   </a:txBody>
@@ -25632,12 +25632,12 @@
                     <a:p>
                       <a:pPr algn="ctr"/>
                       <a:r>
-                        <a:rPr sz="1100">
-                          <a:solidFill>
-                            <a:srgbClr val="222730"/>
-                          </a:solidFill>
-                        </a:rPr>
-                        <a:t>18</a:t>
+                        <a:rPr sz="1050">
+                          <a:solidFill>
+                            <a:srgbClr val="222730"/>
+                          </a:solidFill>
+                        </a:rPr>
+                        <a:t>16 / 17</a:t>
                       </a:r>
                     </a:p>
                   </a:txBody>
@@ -25654,12 +25654,12 @@
                     <a:p>
                       <a:pPr algn="ctr"/>
                       <a:r>
-                        <a:rPr sz="1100">
-                          <a:solidFill>
-                            <a:srgbClr val="222730"/>
-                          </a:solidFill>
-                        </a:rPr>
-                        <a:t>자식→부모 참조</a:t>
+                        <a:rPr sz="1050">
+                          <a:solidFill>
+                            <a:srgbClr val="222730"/>
+                          </a:solidFill>
+                        </a:rPr>
+                        <a:t>Part 4에서 BATCH_RUN_LOG 추가</a:t>
                       </a:r>
                     </a:p>
                   </a:txBody>
@@ -25678,12 +25678,12 @@
                     <a:p>
                       <a:pPr algn="l"/>
                       <a:r>
-                        <a:rPr sz="1100">
-                          <a:solidFill>
-                            <a:srgbClr val="222730"/>
-                          </a:solidFill>
-                        </a:rPr>
-                        <a:t>도메인</a:t>
+                        <a:rPr sz="1050">
+                          <a:solidFill>
+                            <a:srgbClr val="222730"/>
+                          </a:solidFill>
+                        </a:rPr>
+                        <a:t>FK 관계</a:t>
                       </a:r>
                     </a:p>
                   </a:txBody>
@@ -25700,12 +25700,12 @@
                     <a:p>
                       <a:pPr algn="ctr"/>
                       <a:r>
-                        <a:rPr sz="1100">
-                          <a:solidFill>
-                            <a:srgbClr val="222730"/>
-                          </a:solidFill>
-                        </a:rPr>
-                        <a:t>6</a:t>
+                        <a:rPr sz="1050">
+                          <a:solidFill>
+                            <a:srgbClr val="222730"/>
+                          </a:solidFill>
+                        </a:rPr>
+                        <a:t>18</a:t>
                       </a:r>
                     </a:p>
                   </a:txBody>
@@ -25722,12 +25722,12 @@
                     <a:p>
                       <a:pPr algn="ctr"/>
                       <a:r>
-                        <a:rPr sz="1100">
-                          <a:solidFill>
-                            <a:srgbClr val="222730"/>
-                          </a:solidFill>
-                        </a:rPr>
-                        <a:t>고객·주문·상품·배송·문의·조직</a:t>
+                        <a:rPr sz="1050">
+                          <a:solidFill>
+                            <a:srgbClr val="222730"/>
+                          </a:solidFill>
+                        </a:rPr>
+                        <a:t>자식→부모 참조</a:t>
                       </a:r>
                     </a:p>
                   </a:txBody>
@@ -25746,7 +25746,7 @@
                     <a:p>
                       <a:pPr algn="l"/>
                       <a:r>
-                        <a:rPr sz="1100">
+                        <a:rPr sz="1050">
                           <a:solidFill>
                             <a:srgbClr val="222730"/>
                           </a:solidFill>
@@ -25768,7 +25768,7 @@
                     <a:p>
                       <a:pPr algn="ctr"/>
                       <a:r>
-                        <a:rPr sz="1100">
+                        <a:rPr sz="1050">
                           <a:solidFill>
                             <a:srgbClr val="222730"/>
                           </a:solidFill>
@@ -25790,7 +25790,7 @@
                     <a:p>
                       <a:pPr algn="ctr"/>
                       <a:r>
-                        <a:rPr sz="1100">
+                        <a:rPr sz="1050">
                           <a:solidFill>
                             <a:srgbClr val="222730"/>
                           </a:solidFill>
@@ -25875,7 +25875,7 @@
           <a:p>
             <a:r>
               <a:rPr lang="ko-KR" altLang="en-US" dirty="0" smtClean="0"/>
-              <a:t>비업무 테이블 4종</a:t>
+              <a:t>보조 테이블 &amp; BO_TEST 구조</a:t>
             </a:r>
             <a:r>
               <a:rPr lang="en-US" altLang="ko-KR" dirty="0" smtClean="0"/>
@@ -25918,7 +25918,7 @@
                   <a:srgbClr val="50646E"/>
                 </a:solidFill>
               </a:rPr>
-              <a:t>업무 ERD와 구분해 제외</a:t>
+              <a:t>업무 ERD와 구분 / 성능·인덱스 실습용</a:t>
             </a:r>
             <a:r>
               <a:rPr lang="ko-KR" altLang="en-US" sz="1600" dirty="0">
@@ -25965,7 +25965,7 @@
                   <a:srgbClr val="222730"/>
                 </a:solidFill>
               </a:rPr>
-              <a:t>• 설치·실습 과정에서 생성된 스크래치/샘플성 테이블</a:t>
+              <a:t>• 보조 4개(BO_TEST·PERF_STAT·PERF_STAT_P·TBL_IDX01)는 업무 FK 체인에서 제외</a:t>
             </a:r>
             <a:endParaRPr lang="ko-KR" altLang="en-US" dirty="0"/>
           </a:p>
@@ -25981,7 +25981,7 @@
                   <a:srgbClr val="222730"/>
                 </a:solidFill>
               </a:rPr>
-              <a:t>• 업무 규칙(PK/FK 체인)에 포함되지 않아 ERD 분석 대상에서 제외</a:t>
+              <a:t>• BATCH_RUN_LOG은 Part 4 배치 실행 이력용으로 별도 생성(실습 후 17개)</a:t>
             </a:r>
           </a:p>
           <a:p>
@@ -25996,7 +25996,7 @@
                   <a:srgbClr val="222730"/>
                 </a:solidFill>
               </a:rPr>
-              <a:t>• 역공학 시 USER_TABLES 전수 조회 후 업무 12개만 선별</a:t>
+              <a:t>• BO_TEST = 100만 건 대용량 인덱스·접근경로 실습 테이블(PK 없음)</a:t>
             </a:r>
           </a:p>
           <a:p>
@@ -26011,7 +26011,7 @@
                   <a:srgbClr val="222730"/>
                 </a:solidFill>
               </a:rPr>
-              <a:t>• 분석 범위를 명확히 해 도메인 해석의 노이즈 제거</a:t>
+              <a:t>•   └ 컬럼 N1~N5 / 복합 인덱스 BO_TEST_N1(N5,N2,N3,N4)·BO_TEST_N2(N3,N4,N5)</a:t>
             </a:r>
           </a:p>
         </p:txBody>
@@ -39607,7 +39607,7 @@
                   <a:srgbClr val="50646E"/>
                 </a:solidFill>
               </a:rPr>
-              <a:t>업무 테이블 12개 + 비업무 4개(스크래치)</a:t>
+              <a:t>업무 12개 + 보조 4개 = 원본 16개 (실습 후 BATCH_RUN_LOG 추가로 17개)</a:t>
             </a:r>
             <a:r>
               <a:rPr lang="ko-KR" altLang="en-US" sz="1600" dirty="0">
